--- a/presentation/ClothesShop-Diploma.pptx
+++ b/presentation/ClothesShop-Diploma.pptx
@@ -785,7 +785,7 @@
           <a:p>
             <a:r>
               <a:rPr lang="en-US" dirty="0"/>
-              <a:t>Контейнер — composition root. Для боевого режима он собирается из Firebase-реализаций, для превью — из моков. ViewModel создаются фабричными методами контейнера.</a:t>
+              <a:t>Контейнер — composition root. Для боевого режима он собирается из Firebase-реализаций, для превью — из mock-репозиториев (AppDIContainer.mock). ViewModel создаются фабричными методами контейнера.</a:t>
             </a:r>
             <a:endParaRPr lang="en-US" dirty="0"/>
           </a:p>
@@ -3385,7 +3385,7 @@
                 <a:ea typeface="Arial" pitchFamily="34" charset="-122"/>
                 <a:cs typeface="Arial" pitchFamily="34" charset="-120"/>
               </a:rPr>
-              <a:t>ViewModel, UI-модели, ViewMode, Router, валидаторы</a:t>
+              <a:t>ViewModel, UI-модели, ViewMode, Router (push / pop), валидаторы</a:t>
             </a:r>
             <a:endParaRPr lang="en-US" sz="1200" dirty="0"/>
           </a:p>
@@ -6072,7 +6072,7 @@
                 <a:ea typeface="Arial" pitchFamily="34" charset="-122"/>
                 <a:cs typeface="Arial" pitchFamily="34" charset="-120"/>
               </a:rPr>
-              <a:t>preview()</a:t>
+              <a:t>mock()</a:t>
             </a:r>
             <a:endParaRPr lang="en-US" sz="1200" dirty="0"/>
           </a:p>
@@ -6089,7 +6089,7 @@
                 <a:ea typeface="Arial" pitchFamily="34" charset="-122"/>
                 <a:cs typeface="Arial" pitchFamily="34" charset="-120"/>
               </a:rPr>
-              <a:t>PreviewRepositories (моки)</a:t>
+              <a:t>Mock…Repository + MockResponse</a:t>
             </a:r>
             <a:endParaRPr lang="en-US" sz="1200" dirty="0"/>
           </a:p>
@@ -6422,7 +6422,7 @@
                 <a:ea typeface="Courier New" pitchFamily="34" charset="-122"/>
                 <a:cs typeface="Courier New" pitchFamily="34" charset="-120"/>
               </a:rPr>
-              <a:t>struct Repositories {</a:t>
+              <a:t>struct AppRepositories {</a:t>
             </a:r>
             <a:endParaRPr lang="en-US" sz="1100" dirty="0"/>
           </a:p>
@@ -8547,7 +8547,7 @@
                 <a:ea typeface="Arial" pitchFamily="34" charset="-122"/>
                 <a:cs typeface="Arial" pitchFamily="34" charset="-120"/>
               </a:rPr>
-              <a:t>При входе каталог, корзина и настройки загружаются параллельно (async let в LoadStorefrontUseCase)</a:t>
+              <a:t>При входе каталог, корзина и настройки загружаются параллельно (async let в GetShopDataUseCase → ShopData)</a:t>
             </a:r>
             <a:endParaRPr lang="en-US" sz="1200" dirty="0"/>
           </a:p>
